--- a/examples/ppt169_webgpu_intro_quick/exports/ppt169_webgpu_intro_quick.pptx
+++ b/examples/ppt169_webgpu_intro_quick/exports/ppt169_webgpu_intro_quick.pptx
@@ -928,7 +928,7 @@
           <p:spPr>
             <a:xfrm>
               <a:off x="1441704" y="1499235"/>
-              <a:ext cx="2461565" cy="234696"/>
+              <a:ext cx="2615184" cy="234696"/>
             </a:xfrm>
             <a:prstGeom prst="rect">
               <a:avLst/>
@@ -1237,7 +1237,7 @@
           <p:spPr>
             <a:xfrm>
               <a:off x="6623304" y="1699260"/>
-              <a:ext cx="2532278" cy="234696"/>
+              <a:ext cx="2621128" cy="234696"/>
             </a:xfrm>
             <a:prstGeom prst="rect">
               <a:avLst/>
@@ -1372,7 +1372,7 @@
           <p:spPr>
             <a:xfrm>
               <a:off x="6622161" y="4322921"/>
-              <a:ext cx="3009565" cy="278702"/>
+              <a:ext cx="3393550" cy="278702"/>
             </a:xfrm>
             <a:prstGeom prst="rect">
               <a:avLst/>
@@ -1819,7 +1819,7 @@
           <p:spPr>
             <a:xfrm>
               <a:off x="527304" y="746760"/>
-              <a:ext cx="1215695" cy="234696"/>
+              <a:ext cx="1296467" cy="234696"/>
             </a:xfrm>
             <a:prstGeom prst="rect">
               <a:avLst/>
@@ -1972,7 +1972,7 @@
           <p:spPr>
             <a:xfrm>
               <a:off x="794004" y="1889760"/>
-              <a:ext cx="3517697" cy="234696"/>
+              <a:ext cx="3768090" cy="234696"/>
             </a:xfrm>
             <a:prstGeom prst="rect">
               <a:avLst/>
@@ -2048,7 +2048,7 @@
           <p:spPr>
             <a:xfrm>
               <a:off x="793623" y="2262664"/>
-              <a:ext cx="5970778" cy="3821240"/>
+              <a:ext cx="6182106" cy="3821240"/>
             </a:xfrm>
             <a:prstGeom prst="rect">
               <a:avLst/>
@@ -2353,7 +2353,7 @@
           <p:spPr>
             <a:xfrm>
               <a:off x="8146161" y="1941671"/>
-              <a:ext cx="1476855" cy="278702"/>
+              <a:ext cx="1486413" cy="278702"/>
             </a:xfrm>
             <a:prstGeom prst="rect">
               <a:avLst/>
@@ -2565,7 +2565,7 @@
           <p:spPr>
             <a:xfrm>
               <a:off x="8146161" y="4075271"/>
-              <a:ext cx="1339228" cy="278702"/>
+              <a:ext cx="1387226" cy="278702"/>
             </a:xfrm>
             <a:prstGeom prst="rect">
               <a:avLst/>
@@ -2671,7 +2671,7 @@
           <p:spPr>
             <a:xfrm>
               <a:off x="8146161" y="5142071"/>
-              <a:ext cx="1029432" cy="278702"/>
+              <a:ext cx="1077763" cy="278702"/>
             </a:xfrm>
             <a:prstGeom prst="rect">
               <a:avLst/>
@@ -2817,7 +2817,7 @@
           <p:spPr>
             <a:xfrm>
               <a:off x="8547354" y="2727960"/>
-              <a:ext cx="916838" cy="234696"/>
+              <a:ext cx="957224" cy="234696"/>
             </a:xfrm>
             <a:prstGeom prst="rect">
               <a:avLst/>
@@ -2897,7 +2897,7 @@
           <p:spPr>
             <a:xfrm>
               <a:off x="8547354" y="4861560"/>
-              <a:ext cx="2234288" cy="234696"/>
+              <a:ext cx="2250567" cy="234696"/>
             </a:xfrm>
             <a:prstGeom prst="rect">
               <a:avLst/>
@@ -3311,7 +3311,7 @@
           <p:spPr>
             <a:xfrm>
               <a:off x="527304" y="746760"/>
-              <a:ext cx="1215695" cy="234696"/>
+              <a:ext cx="1296467" cy="234696"/>
             </a:xfrm>
             <a:prstGeom prst="rect">
               <a:avLst/>
@@ -3923,8 +3923,8 @@
             </p:nvSpPr>
             <p:spPr>
               <a:xfrm>
-                <a:off x="1238186" y="2491264"/>
-                <a:ext cx="457328" cy="249364"/>
+                <a:off x="1172837" y="2491264"/>
+                <a:ext cx="588026" cy="249364"/>
               </a:xfrm>
               <a:prstGeom prst="rect">
                 <a:avLst/>
@@ -4029,8 +4029,8 @@
             </p:nvSpPr>
             <p:spPr>
               <a:xfrm>
-                <a:off x="3028886" y="2491264"/>
-                <a:ext cx="457328" cy="249364"/>
+                <a:off x="2963537" y="2491264"/>
+                <a:ext cx="588026" cy="249364"/>
               </a:xfrm>
               <a:prstGeom prst="rect">
                 <a:avLst/>
@@ -4135,8 +4135,8 @@
             </p:nvSpPr>
             <p:spPr>
               <a:xfrm>
-                <a:off x="4819586" y="2491264"/>
-                <a:ext cx="457328" cy="249364"/>
+                <a:off x="4754237" y="2491264"/>
+                <a:ext cx="588026" cy="249364"/>
               </a:xfrm>
               <a:prstGeom prst="rect">
                 <a:avLst/>
@@ -4330,9 +4330,9 @@
         <p:grpSpPr>
           <a:xfrm>
             <a:off x="6248400" y="1676400"/>
-            <a:ext cx="5410200" cy="2667000"/>
+            <a:ext cx="5571974" cy="2667000"/>
             <a:chOff x="6248400" y="1676400"/>
-            <a:chExt cx="5410200" cy="2667000"/>
+            <a:chExt cx="5571974" cy="2667000"/>
           </a:xfrm>
         </p:grpSpPr>
         <p:sp>
@@ -4619,7 +4619,7 @@
             <p:spPr>
               <a:xfrm>
                 <a:off x="6699123" y="2453164"/>
-                <a:ext cx="3467354" cy="744665"/>
+                <a:ext cx="3678682" cy="744665"/>
               </a:xfrm>
               <a:prstGeom prst="rect">
                 <a:avLst/>
@@ -4688,7 +4688,7 @@
           <p:spPr>
             <a:xfrm>
               <a:off x="6470904" y="3547110"/>
-              <a:ext cx="5110978" cy="234696"/>
+              <a:ext cx="5349470" cy="234696"/>
             </a:xfrm>
             <a:prstGeom prst="rect">
               <a:avLst/>
@@ -4847,7 +4847,7 @@
           <p:spPr>
             <a:xfrm>
               <a:off x="829056" y="4663440"/>
-              <a:ext cx="5512710" cy="352044"/>
+              <a:ext cx="5445602" cy="352044"/>
             </a:xfrm>
             <a:prstGeom prst="rect">
               <a:avLst/>
@@ -5825,7 +5825,7 @@
           <p:spPr>
             <a:xfrm>
               <a:off x="527304" y="746760"/>
-              <a:ext cx="1401470" cy="234696"/>
+              <a:ext cx="1482242" cy="234696"/>
             </a:xfrm>
             <a:prstGeom prst="rect">
               <a:avLst/>
@@ -7006,7 +7006,7 @@
           <p:spPr>
             <a:xfrm>
               <a:off x="905256" y="5063490"/>
-              <a:ext cx="9759391" cy="352044"/>
+              <a:ext cx="9819970" cy="352044"/>
             </a:xfrm>
             <a:prstGeom prst="rect">
               <a:avLst/>
@@ -7363,7 +7363,7 @@
             <p:spPr>
               <a:xfrm>
                 <a:off x="965073" y="6272689"/>
-                <a:ext cx="4773233" cy="249364"/>
+                <a:ext cx="4931033" cy="249364"/>
               </a:xfrm>
               <a:prstGeom prst="rect">
                 <a:avLst/>
@@ -8122,7 +8122,7 @@
           <p:spPr>
             <a:xfrm>
               <a:off x="527304" y="746760"/>
-              <a:ext cx="844144" cy="234696"/>
+              <a:ext cx="924916" cy="234696"/>
             </a:xfrm>
             <a:prstGeom prst="rect">
               <a:avLst/>
@@ -8327,7 +8327,7 @@
             <p:spPr>
               <a:xfrm>
                 <a:off x="905256" y="2396490"/>
-                <a:ext cx="3027624" cy="352044"/>
+                <a:ext cx="3071241" cy="352044"/>
               </a:xfrm>
               <a:prstGeom prst="rect">
                 <a:avLst/>
@@ -8449,7 +8449,7 @@
             <p:spPr>
               <a:xfrm>
                 <a:off x="905256" y="3539490"/>
-                <a:ext cx="2555337" cy="352044"/>
+                <a:ext cx="2598953" cy="352044"/>
               </a:xfrm>
               <a:prstGeom prst="rect">
                 <a:avLst/>
@@ -8557,9 +8557,9 @@
           <p:grpSpPr>
             <a:xfrm>
               <a:off x="905256" y="4682490"/>
-              <a:ext cx="2799116" cy="912686"/>
+              <a:ext cx="2842732" cy="912686"/>
               <a:chOff x="905256" y="4682490"/>
-              <a:chExt cx="2799116" cy="912686"/>
+              <a:chExt cx="2842732" cy="912686"/>
             </a:xfrm>
           </p:grpSpPr>
           <p:sp>
@@ -8571,7 +8571,7 @@
             <p:spPr>
               <a:xfrm>
                 <a:off x="905256" y="4682490"/>
-                <a:ext cx="2799116" cy="352044"/>
+                <a:ext cx="2842732" cy="352044"/>
               </a:xfrm>
               <a:prstGeom prst="rect">
                 <a:avLst/>
@@ -10431,7 +10431,7 @@
           <p:spPr>
             <a:xfrm>
               <a:off x="527304" y="746760"/>
-              <a:ext cx="1215695" cy="234696"/>
+              <a:ext cx="1296467" cy="234696"/>
             </a:xfrm>
             <a:prstGeom prst="rect">
               <a:avLst/>
@@ -10583,8 +10583,8 @@
           </p:nvSpPr>
           <p:spPr>
             <a:xfrm>
-              <a:off x="2788430" y="1951196"/>
-              <a:ext cx="747740" cy="278702"/>
+              <a:off x="2783606" y="1951196"/>
+              <a:ext cx="757389" cy="278702"/>
             </a:xfrm>
             <a:prstGeom prst="rect">
               <a:avLst/>
@@ -10649,8 +10649,8 @@
           </p:nvSpPr>
           <p:spPr>
             <a:xfrm>
-              <a:off x="5303030" y="1951196"/>
-              <a:ext cx="747740" cy="278702"/>
+              <a:off x="5298206" y="1951196"/>
+              <a:ext cx="757389" cy="278702"/>
             </a:xfrm>
             <a:prstGeom prst="rect">
               <a:avLst/>
@@ -10715,8 +10715,8 @@
           </p:nvSpPr>
           <p:spPr>
             <a:xfrm>
-              <a:off x="7817630" y="1951196"/>
-              <a:ext cx="747740" cy="278702"/>
+              <a:off x="7812806" y="1951196"/>
+              <a:ext cx="757389" cy="278702"/>
             </a:xfrm>
             <a:prstGeom prst="rect">
               <a:avLst/>
@@ -10896,8 +10896,8 @@
           </p:nvSpPr>
           <p:spPr>
             <a:xfrm>
-              <a:off x="2511885" y="3132296"/>
-              <a:ext cx="1300829" cy="278702"/>
+              <a:off x="2415889" y="3132296"/>
+              <a:ext cx="1492822" cy="278702"/>
             </a:xfrm>
             <a:prstGeom prst="rect">
               <a:avLst/>
@@ -11002,8 +11002,8 @@
           </p:nvSpPr>
           <p:spPr>
             <a:xfrm>
-              <a:off x="5026485" y="3132296"/>
-              <a:ext cx="1300829" cy="278702"/>
+              <a:off x="4930489" y="3132296"/>
+              <a:ext cx="1492822" cy="278702"/>
             </a:xfrm>
             <a:prstGeom prst="rect">
               <a:avLst/>
@@ -11108,8 +11108,8 @@
           </p:nvSpPr>
           <p:spPr>
             <a:xfrm>
-              <a:off x="7541085" y="3132296"/>
-              <a:ext cx="1300829" cy="278702"/>
+              <a:off x="7445089" y="3132296"/>
+              <a:ext cx="1492822" cy="278702"/>
             </a:xfrm>
             <a:prstGeom prst="rect">
               <a:avLst/>
@@ -11423,8 +11423,8 @@
           </p:nvSpPr>
           <p:spPr>
             <a:xfrm>
-              <a:off x="5008129" y="5227796"/>
-              <a:ext cx="1337542" cy="278702"/>
+              <a:off x="4909393" y="5227796"/>
+              <a:ext cx="1535015" cy="278702"/>
             </a:xfrm>
             <a:prstGeom prst="rect">
               <a:avLst/>
@@ -11463,8 +11463,8 @@
           </p:nvSpPr>
           <p:spPr>
             <a:xfrm>
-              <a:off x="5375391" y="5570696"/>
-              <a:ext cx="603018" cy="278702"/>
+              <a:off x="5351271" y="5570696"/>
+              <a:ext cx="651259" cy="278702"/>
             </a:xfrm>
             <a:prstGeom prst="rect">
               <a:avLst/>
@@ -12567,7 +12567,7 @@
           <p:spPr>
             <a:xfrm>
               <a:off x="527304" y="746760"/>
-              <a:ext cx="844144" cy="234696"/>
+              <a:ext cx="924916" cy="234696"/>
             </a:xfrm>
             <a:prstGeom prst="rect">
               <a:avLst/>
@@ -12748,7 +12748,7 @@
           <p:spPr>
             <a:xfrm>
               <a:off x="983361" y="2055971"/>
-              <a:ext cx="1333485" cy="278702"/>
+              <a:ext cx="1381275" cy="278702"/>
             </a:xfrm>
             <a:prstGeom prst="rect">
               <a:avLst/>
@@ -13004,7 +13004,7 @@
           <p:spPr>
             <a:xfrm>
               <a:off x="983361" y="3884771"/>
-              <a:ext cx="2733331" cy="278702"/>
+              <a:ext cx="2781709" cy="278702"/>
             </a:xfrm>
             <a:prstGeom prst="rect">
               <a:avLst/>
@@ -13125,9 +13125,9 @@
         <p:grpSpPr>
           <a:xfrm>
             <a:off x="527685" y="4996815"/>
-            <a:ext cx="4967402" cy="1312069"/>
+            <a:ext cx="4979594" cy="1312069"/>
             <a:chOff x="527685" y="4996815"/>
-            <a:chExt cx="4967402" cy="1312069"/>
+            <a:chExt cx="4979594" cy="1312069"/>
           </a:xfrm>
         </p:grpSpPr>
         <p:grpSp>
@@ -13246,7 +13246,7 @@
           <p:spPr>
             <a:xfrm>
               <a:off x="886206" y="4996815"/>
-              <a:ext cx="3681679" cy="352044"/>
+              <a:ext cx="3743782" cy="352044"/>
             </a:xfrm>
             <a:prstGeom prst="rect">
               <a:avLst/>
@@ -13449,7 +13449,7 @@
           <p:spPr>
             <a:xfrm>
               <a:off x="886206" y="5587365"/>
-              <a:ext cx="4608881" cy="352044"/>
+              <a:ext cx="4621073" cy="352044"/>
             </a:xfrm>
             <a:prstGeom prst="rect">
               <a:avLst/>
@@ -13581,7 +13581,7 @@
           <p:spPr>
             <a:xfrm>
               <a:off x="6585204" y="1870710"/>
-              <a:ext cx="1878025" cy="234696"/>
+              <a:ext cx="2079955" cy="234696"/>
             </a:xfrm>
             <a:prstGeom prst="rect">
               <a:avLst/>
@@ -13657,7 +13657,7 @@
           <p:spPr>
             <a:xfrm>
               <a:off x="6584823" y="2357914"/>
-              <a:ext cx="4361434" cy="3983164"/>
+              <a:ext cx="4662170" cy="3983164"/>
             </a:xfrm>
             <a:prstGeom prst="rect">
               <a:avLst/>
@@ -14163,7 +14163,7 @@
           <p:spPr>
             <a:xfrm>
               <a:off x="527304" y="746760"/>
-              <a:ext cx="1215695" cy="234696"/>
+              <a:ext cx="1296467" cy="234696"/>
             </a:xfrm>
             <a:prstGeom prst="rect">
               <a:avLst/>
@@ -14620,8 +14620,8 @@
           </p:nvSpPr>
           <p:spPr>
             <a:xfrm>
-              <a:off x="6986777" y="2103596"/>
-              <a:ext cx="1228347" cy="278702"/>
+              <a:off x="6910313" y="2103596"/>
+              <a:ext cx="1381275" cy="278702"/>
             </a:xfrm>
             <a:prstGeom prst="rect">
               <a:avLst/>
@@ -14848,9 +14848,9 @@
         <p:grpSpPr>
           <a:xfrm>
             <a:off x="533400" y="4953000"/>
-            <a:ext cx="5410200" cy="1333500"/>
+            <a:ext cx="5492750" cy="1333500"/>
             <a:chOff x="533400" y="4953000"/>
-            <a:chExt cx="5410200" cy="1333500"/>
+            <a:chExt cx="5492750" cy="1333500"/>
           </a:xfrm>
         </p:grpSpPr>
         <p:sp>
@@ -14888,7 +14888,7 @@
           <p:spPr>
             <a:xfrm>
               <a:off x="755904" y="5090160"/>
-              <a:ext cx="1999183" cy="234696"/>
+              <a:ext cx="2120341" cy="234696"/>
             </a:xfrm>
             <a:prstGeom prst="rect">
               <a:avLst/>
@@ -14928,7 +14928,7 @@
           <p:spPr>
             <a:xfrm>
               <a:off x="754761" y="5427821"/>
-              <a:ext cx="4856607" cy="545402"/>
+              <a:ext cx="5271389" cy="545402"/>
             </a:xfrm>
             <a:prstGeom prst="rect">
               <a:avLst/>
@@ -15025,7 +15025,7 @@
           <p:spPr>
             <a:xfrm>
               <a:off x="6470904" y="5090160"/>
-              <a:ext cx="1999183" cy="234696"/>
+              <a:ext cx="2120341" cy="234696"/>
             </a:xfrm>
             <a:prstGeom prst="rect">
               <a:avLst/>
@@ -15065,7 +15065,7 @@
           <p:spPr>
             <a:xfrm>
               <a:off x="6469761" y="5427821"/>
-              <a:ext cx="3296666" cy="545402"/>
+              <a:ext cx="3486023" cy="545402"/>
             </a:xfrm>
             <a:prstGeom prst="rect">
               <a:avLst/>
@@ -15534,7 +15534,7 @@
           <p:spPr>
             <a:xfrm>
               <a:off x="527304" y="746760"/>
-              <a:ext cx="844144" cy="234696"/>
+              <a:ext cx="924916" cy="234696"/>
             </a:xfrm>
             <a:prstGeom prst="rect">
               <a:avLst/>
@@ -15850,7 +15850,7 @@
           <p:spPr>
             <a:xfrm>
               <a:off x="1403604" y="2747010"/>
-              <a:ext cx="1183386" cy="234696"/>
+              <a:ext cx="1344930" cy="234696"/>
             </a:xfrm>
             <a:prstGeom prst="rect">
               <a:avLst/>
@@ -15970,7 +15970,7 @@
             <p:spPr>
               <a:xfrm>
                 <a:off x="983361" y="3618071"/>
-                <a:ext cx="1228347" cy="278702"/>
+                <a:ext cx="1276137" cy="278702"/>
               </a:xfrm>
               <a:prstGeom prst="rect">
                 <a:avLst/>
@@ -16119,7 +16119,7 @@
             <p:spPr>
               <a:xfrm>
                 <a:off x="983361" y="4761071"/>
-                <a:ext cx="1476855" cy="278702"/>
+                <a:ext cx="1486413" cy="278702"/>
               </a:xfrm>
               <a:prstGeom prst="rect">
                 <a:avLst/>
@@ -16736,7 +16736,7 @@
           <p:spPr>
             <a:xfrm>
               <a:off x="7118604" y="2747010"/>
-              <a:ext cx="1304544" cy="234696"/>
+              <a:ext cx="1433779" cy="234696"/>
             </a:xfrm>
             <a:prstGeom prst="rect">
               <a:avLst/>
@@ -16856,7 +16856,7 @@
             <p:spPr>
               <a:xfrm>
                 <a:off x="6698361" y="3618071"/>
-                <a:ext cx="1371717" cy="278702"/>
+                <a:ext cx="1381275" cy="278702"/>
               </a:xfrm>
               <a:prstGeom prst="rect">
                 <a:avLst/>
@@ -17868,7 +17868,7 @@
           <p:spPr>
             <a:xfrm>
               <a:off x="527304" y="746760"/>
-              <a:ext cx="1215695" cy="234696"/>
+              <a:ext cx="1296467" cy="234696"/>
             </a:xfrm>
             <a:prstGeom prst="rect">
               <a:avLst/>
@@ -18129,7 +18129,7 @@
           <p:spPr>
             <a:xfrm>
               <a:off x="1403604" y="2194560"/>
-              <a:ext cx="1183386" cy="234696"/>
+              <a:ext cx="1344930" cy="234696"/>
             </a:xfrm>
             <a:prstGeom prst="rect">
               <a:avLst/>
@@ -18209,7 +18209,7 @@
             <p:spPr>
               <a:xfrm>
                 <a:off x="983361" y="2817971"/>
-                <a:ext cx="1228347" cy="278702"/>
+                <a:ext cx="1276137" cy="278702"/>
               </a:xfrm>
               <a:prstGeom prst="rect">
                 <a:avLst/>
@@ -18404,7 +18404,7 @@
             <p:spPr>
               <a:xfrm>
                 <a:off x="983361" y="4970621"/>
-                <a:ext cx="1476855" cy="278702"/>
+                <a:ext cx="1486413" cy="278702"/>
               </a:xfrm>
               <a:prstGeom prst="rect">
                 <a:avLst/>
@@ -18594,7 +18594,7 @@
           <p:spPr>
             <a:xfrm>
               <a:off x="5899404" y="1889760"/>
-              <a:ext cx="2952293" cy="234696"/>
+              <a:ext cx="3041142" cy="234696"/>
             </a:xfrm>
             <a:prstGeom prst="rect">
               <a:avLst/>
@@ -18670,7 +18670,7 @@
           <p:spPr>
             <a:xfrm>
               <a:off x="5899023" y="2357914"/>
-              <a:ext cx="5060442" cy="4135564"/>
+              <a:ext cx="5288026" cy="4135564"/>
             </a:xfrm>
             <a:prstGeom prst="rect">
               <a:avLst/>
@@ -19208,7 +19208,7 @@
           <p:spPr>
             <a:xfrm>
               <a:off x="527304" y="746760"/>
-              <a:ext cx="1215695" cy="234696"/>
+              <a:ext cx="1296467" cy="234696"/>
             </a:xfrm>
             <a:prstGeom prst="rect">
               <a:avLst/>
@@ -20395,8 +20395,8 @@
           </p:nvSpPr>
           <p:spPr>
             <a:xfrm>
-              <a:off x="858469" y="5071110"/>
-              <a:ext cx="1369162" cy="234696"/>
+              <a:off x="870585" y="5071110"/>
+              <a:ext cx="1344930" cy="234696"/>
             </a:xfrm>
             <a:prstGeom prst="rect">
               <a:avLst/>
@@ -20501,8 +20501,8 @@
           </p:nvSpPr>
           <p:spPr>
             <a:xfrm>
-              <a:off x="3300527" y="5071110"/>
-              <a:ext cx="1037996" cy="234696"/>
+              <a:off x="3280334" y="5071110"/>
+              <a:ext cx="1078382" cy="234696"/>
             </a:xfrm>
             <a:prstGeom prst="rect">
               <a:avLst/>
@@ -20607,8 +20607,8 @@
           </p:nvSpPr>
           <p:spPr>
             <a:xfrm>
-              <a:off x="5702198" y="5071110"/>
-              <a:ext cx="787603" cy="234696"/>
+              <a:off x="5734507" y="5071110"/>
+              <a:ext cx="722986" cy="234696"/>
             </a:xfrm>
             <a:prstGeom prst="rect">
               <a:avLst/>
@@ -20713,8 +20713,8 @@
           </p:nvSpPr>
           <p:spPr>
             <a:xfrm>
-              <a:off x="7732319" y="5071110"/>
-              <a:ext cx="1280312" cy="234696"/>
+              <a:off x="7744435" y="5071110"/>
+              <a:ext cx="1256081" cy="234696"/>
             </a:xfrm>
             <a:prstGeom prst="rect">
               <a:avLst/>
@@ -20819,8 +20819,8 @@
           </p:nvSpPr>
           <p:spPr>
             <a:xfrm>
-              <a:off x="10024948" y="5071110"/>
-              <a:ext cx="1248004" cy="234696"/>
+              <a:off x="10020910" y="5071110"/>
+              <a:ext cx="1256081" cy="234696"/>
             </a:xfrm>
             <a:prstGeom prst="rect">
               <a:avLst/>
@@ -21403,7 +21403,7 @@
           <p:spPr>
             <a:xfrm>
               <a:off x="527304" y="746760"/>
-              <a:ext cx="1029919" cy="234696"/>
+              <a:ext cx="1110691" cy="234696"/>
             </a:xfrm>
             <a:prstGeom prst="rect">
               <a:avLst/>
@@ -21556,7 +21556,7 @@
           <p:spPr>
             <a:xfrm>
               <a:off x="794004" y="1889760"/>
-              <a:ext cx="2580742" cy="234696"/>
+              <a:ext cx="2750363" cy="234696"/>
             </a:xfrm>
             <a:prstGeom prst="rect">
               <a:avLst/>
@@ -21632,7 +21632,7 @@
           <p:spPr>
             <a:xfrm>
               <a:off x="793623" y="2072164"/>
-              <a:ext cx="4832858" cy="4364164"/>
+              <a:ext cx="4930394" cy="4364164"/>
             </a:xfrm>
             <a:prstGeom prst="rect">
               <a:avLst/>
